--- a/attachments/Canonical - Building sovereignity cloud - Event Notes.pptx
+++ b/attachments/Canonical - Building sovereignity cloud - Event Notes.pptx
@@ -146,7 +146,7 @@
 <file path=ppt/revisionInfo.xml><?xml version="1.0" encoding="utf-8"?>
 <p1510:revInfo xmlns:a="http://schemas.openxmlformats.org/drawingml/2006/main" xmlns:r="http://schemas.openxmlformats.org/officeDocument/2006/relationships" xmlns:p1510="http://schemas.microsoft.com/office/powerpoint/2015/10/main">
   <p1510:revLst>
-    <p1510:client id="{E02D6D45-B94D-457C-8328-AE42C14F3269}" v="18" dt="2026-08-17T08:55:47.583"/>
+    <p1510:client id="{F10B3D82-F81A-4556-B614-3222C35ACB4E}" v="2" dt="2026-09-21T09:13:53.663"/>
   </p1510:revLst>
 </p1510:revInfo>
 </file>
@@ -156,31 +156,24 @@
   <pc:docChgLst>
     <pc:chgData name="Ihonosetale Oseghale" userId="b1c3f33a-470a-45b8-9def-2cfcd8b1ae0a" providerId="ADAL" clId="{B0BAAFC9-0A00-41D8-8861-6E2A4290657B}"/>
     <pc:docChg chg="modSld">
-      <pc:chgData name="Ihonosetale Oseghale" userId="b1c3f33a-470a-45b8-9def-2cfcd8b1ae0a" providerId="ADAL" clId="{B0BAAFC9-0A00-41D8-8861-6E2A4290657B}" dt="2026-08-17T08:56:06.955" v="3" actId="1076"/>
+      <pc:chgData name="Ihonosetale Oseghale" userId="b1c3f33a-470a-45b8-9def-2cfcd8b1ae0a" providerId="ADAL" clId="{B0BAAFC9-0A00-41D8-8861-6E2A4290657B}" dt="2026-09-21T09:13:53.662" v="5" actId="1076"/>
       <pc:docMkLst>
         <pc:docMk/>
       </pc:docMkLst>
-      <pc:sldChg chg="modNotesTx">
-        <pc:chgData name="Ihonosetale Oseghale" userId="b1c3f33a-470a-45b8-9def-2cfcd8b1ae0a" providerId="ADAL" clId="{B0BAAFC9-0A00-41D8-8861-6E2A4290657B}" dt="2026-08-17T08:54:35.849" v="2" actId="20577"/>
+      <pc:sldChg chg="modSp">
+        <pc:chgData name="Ihonosetale Oseghale" userId="b1c3f33a-470a-45b8-9def-2cfcd8b1ae0a" providerId="ADAL" clId="{B0BAAFC9-0A00-41D8-8861-6E2A4290657B}" dt="2026-09-21T09:13:53.662" v="5" actId="1076"/>
         <pc:sldMkLst>
           <pc:docMk/>
-          <pc:sldMk cId="0" sldId="256"/>
+          <pc:sldMk cId="3187420198" sldId="273"/>
         </pc:sldMkLst>
-      </pc:sldChg>
-      <pc:sldChg chg="modSp mod">
-        <pc:chgData name="Ihonosetale Oseghale" userId="b1c3f33a-470a-45b8-9def-2cfcd8b1ae0a" providerId="ADAL" clId="{B0BAAFC9-0A00-41D8-8861-6E2A4290657B}" dt="2026-08-17T08:56:06.955" v="3" actId="1076"/>
-        <pc:sldMkLst>
-          <pc:docMk/>
-          <pc:sldMk cId="0" sldId="258"/>
-        </pc:sldMkLst>
-        <pc:spChg chg="mod">
-          <ac:chgData name="Ihonosetale Oseghale" userId="b1c3f33a-470a-45b8-9def-2cfcd8b1ae0a" providerId="ADAL" clId="{B0BAAFC9-0A00-41D8-8861-6E2A4290657B}" dt="2026-08-17T08:56:06.955" v="3" actId="1076"/>
-          <ac:spMkLst>
+        <pc:picChg chg="mod">
+          <ac:chgData name="Ihonosetale Oseghale" userId="b1c3f33a-470a-45b8-9def-2cfcd8b1ae0a" providerId="ADAL" clId="{B0BAAFC9-0A00-41D8-8861-6E2A4290657B}" dt="2026-09-21T09:13:53.662" v="5" actId="1076"/>
+          <ac:picMkLst>
             <pc:docMk/>
-            <pc:sldMk cId="0" sldId="258"/>
-            <ac:spMk id="18" creationId="{00000000-0000-0000-0000-000000000000}"/>
-          </ac:spMkLst>
-        </pc:spChg>
+            <pc:sldMk cId="3187420198" sldId="273"/>
+            <ac:picMk id="6146" creationId="{F3E0B555-95B5-6897-1C3C-047CEA2B0B7F}"/>
+          </ac:picMkLst>
+        </pc:picChg>
       </pc:sldChg>
     </pc:docChg>
   </pc:docChgLst>
@@ -269,7 +262,7 @@
           <a:p>
             <a:fld id="{EB6254B8-78B8-46D1-9302-334A225C7F4A}" type="datetimeFigureOut">
               <a:rPr lang="en-GB" smtClean="0"/>
-              <a:t>17/08/2026</a:t>
+              <a:t>21/09/2026</a:t>
             </a:fld>
             <a:endParaRPr lang="en-GB"/>
           </a:p>
@@ -2837,7 +2830,7 @@
           <a:p>
             <a:fld id="{5BCAD085-E8A6-8845-BD4E-CB4CCA059FC4}" type="datetimeFigureOut">
               <a:rPr lang="en-US" smtClean="0"/>
-              <a:t>8/17/2026</a:t>
+              <a:t>9/21/2026</a:t>
             </a:fld>
             <a:endParaRPr lang="en-US"/>
           </a:p>
@@ -3005,7 +2998,7 @@
           <a:p>
             <a:fld id="{5BCAD085-E8A6-8845-BD4E-CB4CCA059FC4}" type="datetimeFigureOut">
               <a:rPr lang="en-US" smtClean="0"/>
-              <a:t>8/17/2026</a:t>
+              <a:t>9/21/2026</a:t>
             </a:fld>
             <a:endParaRPr lang="en-US"/>
           </a:p>
@@ -3183,7 +3176,7 @@
           <a:p>
             <a:fld id="{5BCAD085-E8A6-8845-BD4E-CB4CCA059FC4}" type="datetimeFigureOut">
               <a:rPr lang="en-US" smtClean="0"/>
-              <a:t>8/17/2026</a:t>
+              <a:t>9/21/2026</a:t>
             </a:fld>
             <a:endParaRPr lang="en-US"/>
           </a:p>
@@ -3351,7 +3344,7 @@
           <a:p>
             <a:fld id="{5BCAD085-E8A6-8845-BD4E-CB4CCA059FC4}" type="datetimeFigureOut">
               <a:rPr lang="en-US" smtClean="0"/>
-              <a:t>8/17/2026</a:t>
+              <a:t>9/21/2026</a:t>
             </a:fld>
             <a:endParaRPr lang="en-US"/>
           </a:p>
@@ -3596,7 +3589,7 @@
           <a:p>
             <a:fld id="{5BCAD085-E8A6-8845-BD4E-CB4CCA059FC4}" type="datetimeFigureOut">
               <a:rPr lang="en-US" smtClean="0"/>
-              <a:t>8/17/2026</a:t>
+              <a:t>9/21/2026</a:t>
             </a:fld>
             <a:endParaRPr lang="en-US"/>
           </a:p>
@@ -3881,7 +3874,7 @@
           <a:p>
             <a:fld id="{5BCAD085-E8A6-8845-BD4E-CB4CCA059FC4}" type="datetimeFigureOut">
               <a:rPr lang="en-US" smtClean="0"/>
-              <a:t>8/17/2026</a:t>
+              <a:t>9/21/2026</a:t>
             </a:fld>
             <a:endParaRPr lang="en-US"/>
           </a:p>
@@ -4300,7 +4293,7 @@
           <a:p>
             <a:fld id="{5BCAD085-E8A6-8845-BD4E-CB4CCA059FC4}" type="datetimeFigureOut">
               <a:rPr lang="en-US" smtClean="0"/>
-              <a:t>8/17/2026</a:t>
+              <a:t>9/21/2026</a:t>
             </a:fld>
             <a:endParaRPr lang="en-US"/>
           </a:p>
@@ -4417,7 +4410,7 @@
           <a:p>
             <a:fld id="{5BCAD085-E8A6-8845-BD4E-CB4CCA059FC4}" type="datetimeFigureOut">
               <a:rPr lang="en-US" smtClean="0"/>
-              <a:t>8/17/2026</a:t>
+              <a:t>9/21/2026</a:t>
             </a:fld>
             <a:endParaRPr lang="en-US"/>
           </a:p>
@@ -4512,7 +4505,7 @@
           <a:p>
             <a:fld id="{5BCAD085-E8A6-8845-BD4E-CB4CCA059FC4}" type="datetimeFigureOut">
               <a:rPr lang="en-US" smtClean="0"/>
-              <a:t>8/17/2026</a:t>
+              <a:t>9/21/2026</a:t>
             </a:fld>
             <a:endParaRPr lang="en-US"/>
           </a:p>
@@ -4787,7 +4780,7 @@
           <a:p>
             <a:fld id="{5BCAD085-E8A6-8845-BD4E-CB4CCA059FC4}" type="datetimeFigureOut">
               <a:rPr lang="en-US" smtClean="0"/>
-              <a:t>8/17/2026</a:t>
+              <a:t>9/21/2026</a:t>
             </a:fld>
             <a:endParaRPr lang="en-US"/>
           </a:p>
@@ -5039,7 +5032,7 @@
           <a:p>
             <a:fld id="{5BCAD085-E8A6-8845-BD4E-CB4CCA059FC4}" type="datetimeFigureOut">
               <a:rPr lang="en-US" smtClean="0"/>
-              <a:t>8/17/2026</a:t>
+              <a:t>9/21/2026</a:t>
             </a:fld>
             <a:endParaRPr lang="en-US"/>
           </a:p>
@@ -5250,7 +5243,7 @@
           <a:p>
             <a:fld id="{5BCAD085-E8A6-8845-BD4E-CB4CCA059FC4}" type="datetimeFigureOut">
               <a:rPr lang="en-US" smtClean="0"/>
-              <a:t>8/17/2026</a:t>
+              <a:t>9/21/2026</a:t>
             </a:fld>
             <a:endParaRPr lang="en-US"/>
           </a:p>
@@ -10057,7 +10050,7 @@
         </p:blipFill>
         <p:spPr bwMode="auto">
           <a:xfrm>
-            <a:off x="4565571" y="647307"/>
+            <a:off x="5576224" y="647307"/>
             <a:ext cx="4951190" cy="5954661"/>
           </a:xfrm>
           <a:prstGeom prst="rect">
